--- a/docs/서버실_출입관리_시스템_개발보고.pptx
+++ b/docs/서버실_출입관리_시스템_개발보고.pptx
@@ -13,6 +13,7 @@
     <p:sldId id="261" r:id="rId12"/>
     <p:sldId id="262" r:id="rId13"/>
     <p:sldId id="263" r:id="rId14"/>
+    <p:sldId id="264" r:id="rId15"/>
   </p:sldIdLst>
   <p:sldSz cx="12191695" cy="6858000" type="screen4x3"/>
   <p:notesSz cx="6858000" cy="9144000"/>
@@ -8775,7 +8776,7 @@
                 </a:solidFill>
                 <a:latin typeface="맑은 고딕"/>
               </a:rPr>
-              <a:t>PageController(화면) · AccessApiController(REST)</a:t>
+              <a:t>PageController(화면) · AccessApiController(REST) · AdminAccessInterceptor(접근 제어)</a:t>
             </a:r>
           </a:p>
         </p:txBody>
@@ -9095,7 +9096,7 @@
                 </a:solidFill>
                 <a:latin typeface="맑은 고딕"/>
               </a:rPr>
-              <a:t>AccessLogMapper(MyBatis) → PostgreSQL access_log</a:t>
+              <a:t>AccessLogMapper · ConfigMapper(MyBatis) → PostgreSQL access_log · sram_config</a:t>
             </a:r>
           </a:p>
         </p:txBody>
@@ -9109,6 +9110,1034 @@
 </file>
 
 <file path=ppt/slides/slide8.xml><?xml version="1.0" encoding="utf-8"?>
+<p:sld xmlns:a="http://schemas.openxmlformats.org/drawingml/2006/main" xmlns:p="http://schemas.openxmlformats.org/presentationml/2006/main" xmlns:r="http://schemas.openxmlformats.org/officeDocument/2006/relationships">
+  <p:cSld>
+    <p:bg>
+      <p:bgPr>
+        <a:solidFill>
+          <a:srgbClr val="F3F2EE"/>
+        </a:solidFill>
+        <a:effectLst/>
+      </p:bgPr>
+    </p:bg>
+    <p:spTree>
+      <p:nvGrpSpPr>
+        <p:cNvPr id="1" name=""/>
+        <p:cNvGrpSpPr/>
+        <p:nvPr/>
+      </p:nvGrpSpPr>
+      <p:grpSpPr/>
+      <p:sp>
+        <p:nvSpPr>
+          <p:cNvPr id="2" name="Rectangle 1"/>
+          <p:cNvSpPr/>
+          <p:nvPr/>
+        </p:nvSpPr>
+        <p:spPr>
+          <a:xfrm>
+            <a:off x="0" y="0"/>
+            <a:ext cx="12191695" cy="1051560"/>
+          </a:xfrm>
+          <a:prstGeom prst="rect">
+            <a:avLst/>
+          </a:prstGeom>
+          <a:solidFill>
+            <a:srgbClr val="222B45"/>
+          </a:solidFill>
+          <a:ln>
+            <a:noFill/>
+          </a:ln>
+          <a:effectLst/>
+        </p:spPr>
+        <p:style>
+          <a:lnRef idx="1">
+            <a:schemeClr val="accent1"/>
+          </a:lnRef>
+          <a:fillRef idx="3">
+            <a:schemeClr val="accent1"/>
+          </a:fillRef>
+          <a:effectRef idx="2">
+            <a:schemeClr val="accent1"/>
+          </a:effectRef>
+          <a:fontRef idx="minor">
+            <a:schemeClr val="lt1"/>
+          </a:fontRef>
+        </p:style>
+        <p:txBody>
+          <a:bodyPr rtlCol="0" anchor="ctr"/>
+          <a:lstStyle/>
+          <a:p>
+            <a:pPr algn="ctr"/>
+          </a:p>
+        </p:txBody>
+      </p:sp>
+      <p:sp>
+        <p:nvSpPr>
+          <p:cNvPr id="3" name="Rectangle 2"/>
+          <p:cNvSpPr/>
+          <p:nvPr/>
+        </p:nvSpPr>
+        <p:spPr>
+          <a:xfrm>
+            <a:off x="502920" y="310896"/>
+            <a:ext cx="109728" cy="457200"/>
+          </a:xfrm>
+          <a:prstGeom prst="rect">
+            <a:avLst/>
+          </a:prstGeom>
+          <a:solidFill>
+            <a:srgbClr val="3B6FD4"/>
+          </a:solidFill>
+          <a:ln>
+            <a:noFill/>
+          </a:ln>
+          <a:effectLst/>
+        </p:spPr>
+        <p:style>
+          <a:lnRef idx="1">
+            <a:schemeClr val="accent1"/>
+          </a:lnRef>
+          <a:fillRef idx="3">
+            <a:schemeClr val="accent1"/>
+          </a:fillRef>
+          <a:effectRef idx="2">
+            <a:schemeClr val="accent1"/>
+          </a:effectRef>
+          <a:fontRef idx="minor">
+            <a:schemeClr val="lt1"/>
+          </a:fontRef>
+        </p:style>
+        <p:txBody>
+          <a:bodyPr rtlCol="0" anchor="ctr"/>
+          <a:lstStyle/>
+          <a:p>
+            <a:pPr algn="ctr"/>
+          </a:p>
+        </p:txBody>
+      </p:sp>
+      <p:sp>
+        <p:nvSpPr>
+          <p:cNvPr id="4" name="TextBox 3"/>
+          <p:cNvSpPr txBox="1"/>
+          <p:nvPr/>
+        </p:nvSpPr>
+        <p:spPr>
+          <a:xfrm>
+            <a:off x="731520" y="164592"/>
+            <a:ext cx="10058400" cy="777240"/>
+          </a:xfrm>
+          <a:prstGeom prst="rect">
+            <a:avLst/>
+          </a:prstGeom>
+          <a:noFill/>
+        </p:spPr>
+        <p:txBody>
+          <a:bodyPr wrap="square" anchor="ctr" lIns="25400" rIns="25400" tIns="25400" bIns="25400">
+            <a:spAutoFit/>
+          </a:bodyPr>
+          <a:lstStyle/>
+          <a:p>
+            <a:pPr algn="l"/>
+            <a:r>
+              <a:rPr sz="2800" b="1">
+                <a:solidFill>
+                  <a:srgbClr val="FFFFFF"/>
+                </a:solidFill>
+                <a:latin typeface="맑은 고딕"/>
+              </a:rPr>
+              <a:t>관리자 운영 기능 (추가)</a:t>
+            </a:r>
+          </a:p>
+          <a:p>
+            <a:pPr algn="l"/>
+            <a:r>
+              <a:rPr sz="1300" b="0">
+                <a:solidFill>
+                  <a:srgbClr val="B9C2D6"/>
+                </a:solidFill>
+                <a:latin typeface="맑은 고딕"/>
+              </a:rPr>
+              <a:t>비밀번호 변경 · 공지 · 설정 패널</a:t>
+            </a:r>
+          </a:p>
+        </p:txBody>
+      </p:sp>
+      <p:sp>
+        <p:nvSpPr>
+          <p:cNvPr id="5" name="TextBox 4"/>
+          <p:cNvSpPr txBox="1"/>
+          <p:nvPr/>
+        </p:nvSpPr>
+        <p:spPr>
+          <a:xfrm>
+            <a:off x="10911535" y="164592"/>
+            <a:ext cx="914400" cy="777240"/>
+          </a:xfrm>
+          <a:prstGeom prst="rect">
+            <a:avLst/>
+          </a:prstGeom>
+          <a:noFill/>
+        </p:spPr>
+        <p:txBody>
+          <a:bodyPr wrap="square" anchor="ctr" lIns="25400" rIns="25400" tIns="25400" bIns="25400">
+            <a:spAutoFit/>
+          </a:bodyPr>
+          <a:lstStyle/>
+          <a:p>
+            <a:pPr algn="r"/>
+            <a:r>
+              <a:rPr sz="3000" b="1">
+                <a:solidFill>
+                  <a:srgbClr val="556A9A"/>
+                </a:solidFill>
+                <a:latin typeface="맑은 고딕"/>
+              </a:rPr>
+              <a:t>07</a:t>
+            </a:r>
+          </a:p>
+        </p:txBody>
+      </p:sp>
+      <p:sp>
+        <p:nvSpPr>
+          <p:cNvPr id="6" name="Rectangle 5"/>
+          <p:cNvSpPr/>
+          <p:nvPr/>
+        </p:nvSpPr>
+        <p:spPr>
+          <a:xfrm>
+            <a:off x="640080" y="1417320"/>
+            <a:ext cx="5349240" cy="2103120"/>
+          </a:xfrm>
+          <a:prstGeom prst="rect">
+            <a:avLst/>
+          </a:prstGeom>
+          <a:solidFill>
+            <a:srgbClr val="FFFFFF"/>
+          </a:solidFill>
+          <a:ln w="12700">
+            <a:solidFill>
+              <a:srgbClr val="E5E3DE"/>
+            </a:solidFill>
+          </a:ln>
+          <a:effectLst/>
+        </p:spPr>
+        <p:style>
+          <a:lnRef idx="1">
+            <a:schemeClr val="accent1"/>
+          </a:lnRef>
+          <a:fillRef idx="3">
+            <a:schemeClr val="accent1"/>
+          </a:fillRef>
+          <a:effectRef idx="2">
+            <a:schemeClr val="accent1"/>
+          </a:effectRef>
+          <a:fontRef idx="minor">
+            <a:schemeClr val="lt1"/>
+          </a:fontRef>
+        </p:style>
+        <p:txBody>
+          <a:bodyPr rtlCol="0" anchor="ctr"/>
+          <a:lstStyle/>
+          <a:p>
+            <a:pPr algn="ctr"/>
+          </a:p>
+        </p:txBody>
+      </p:sp>
+      <p:sp>
+        <p:nvSpPr>
+          <p:cNvPr id="7" name="Rectangle 6"/>
+          <p:cNvSpPr/>
+          <p:nvPr/>
+        </p:nvSpPr>
+        <p:spPr>
+          <a:xfrm>
+            <a:off x="640080" y="1417320"/>
+            <a:ext cx="5349240" cy="82296"/>
+          </a:xfrm>
+          <a:prstGeom prst="rect">
+            <a:avLst/>
+          </a:prstGeom>
+          <a:solidFill>
+            <a:srgbClr val="3B6FD4"/>
+          </a:solidFill>
+          <a:ln>
+            <a:noFill/>
+          </a:ln>
+          <a:effectLst/>
+        </p:spPr>
+        <p:style>
+          <a:lnRef idx="1">
+            <a:schemeClr val="accent1"/>
+          </a:lnRef>
+          <a:fillRef idx="3">
+            <a:schemeClr val="accent1"/>
+          </a:fillRef>
+          <a:effectRef idx="2">
+            <a:schemeClr val="accent1"/>
+          </a:effectRef>
+          <a:fontRef idx="minor">
+            <a:schemeClr val="lt1"/>
+          </a:fontRef>
+        </p:style>
+        <p:txBody>
+          <a:bodyPr rtlCol="0" anchor="ctr"/>
+          <a:lstStyle/>
+          <a:p>
+            <a:pPr algn="ctr"/>
+          </a:p>
+        </p:txBody>
+      </p:sp>
+      <p:sp>
+        <p:nvSpPr>
+          <p:cNvPr id="8" name="TextBox 7"/>
+          <p:cNvSpPr txBox="1"/>
+          <p:nvPr/>
+        </p:nvSpPr>
+        <p:spPr>
+          <a:xfrm>
+            <a:off x="841248" y="1618488"/>
+            <a:ext cx="4946904" cy="457200"/>
+          </a:xfrm>
+          <a:prstGeom prst="rect">
+            <a:avLst/>
+          </a:prstGeom>
+          <a:noFill/>
+        </p:spPr>
+        <p:txBody>
+          <a:bodyPr wrap="square" anchor="t" lIns="25400" rIns="25400" tIns="25400" bIns="25400">
+            <a:spAutoFit/>
+          </a:bodyPr>
+          <a:lstStyle/>
+          <a:p>
+            <a:pPr algn="l"/>
+            <a:r>
+              <a:rPr sz="1600" b="1">
+                <a:solidFill>
+                  <a:srgbClr val="1F1F1D"/>
+                </a:solidFill>
+                <a:latin typeface="맑은 고딕"/>
+              </a:rPr>
+              <a:t>출입 비밀번호 변경</a:t>
+            </a:r>
+          </a:p>
+        </p:txBody>
+      </p:sp>
+      <p:sp>
+        <p:nvSpPr>
+          <p:cNvPr id="9" name="TextBox 8"/>
+          <p:cNvSpPr txBox="1"/>
+          <p:nvPr/>
+        </p:nvSpPr>
+        <p:spPr>
+          <a:xfrm>
+            <a:off x="841248" y="2075688"/>
+            <a:ext cx="4946904" cy="1280160"/>
+          </a:xfrm>
+          <a:prstGeom prst="rect">
+            <a:avLst/>
+          </a:prstGeom>
+          <a:noFill/>
+        </p:spPr>
+        <p:txBody>
+          <a:bodyPr wrap="square" anchor="t" lIns="25400" rIns="25400" tIns="25400" bIns="25400">
+            <a:spAutoFit/>
+          </a:bodyPr>
+          <a:lstStyle/>
+          <a:p>
+            <a:pPr algn="l">
+              <a:spcAft>
+                <a:spcPts val="500"/>
+              </a:spcAft>
+            </a:pPr>
+            <a:r>
+              <a:rPr sz="1250" b="0">
+                <a:solidFill>
+                  <a:srgbClr val="6B6A66"/>
+                </a:solidFill>
+                <a:latin typeface="맑은 고딕"/>
+              </a:rPr>
+              <a:t>• 관리자 화면에서 비밀번호 변경 (DB 저장)</a:t>
+            </a:r>
+          </a:p>
+          <a:p>
+            <a:pPr algn="l">
+              <a:spcAft>
+                <a:spcPts val="500"/>
+              </a:spcAft>
+            </a:pPr>
+            <a:r>
+              <a:rPr sz="1250" b="0">
+                <a:solidFill>
+                  <a:srgbClr val="6B6A66"/>
+                </a:solidFill>
+                <a:latin typeface="맑은 고딕"/>
+              </a:rPr>
+              <a:t>• 재기동해도 유지 (sram_config)</a:t>
+            </a:r>
+          </a:p>
+          <a:p>
+            <a:pPr algn="l">
+              <a:spcAft>
+                <a:spcPts val="500"/>
+              </a:spcAft>
+            </a:pPr>
+            <a:r>
+              <a:rPr sz="1250" b="0">
+                <a:solidFill>
+                  <a:srgbClr val="6B6A66"/>
+                </a:solidFill>
+                <a:latin typeface="맑은 고딕"/>
+              </a:rPr>
+              <a:t>• 마지막 변경일 · 경과일수 표시</a:t>
+            </a:r>
+          </a:p>
+          <a:p>
+            <a:pPr algn="l">
+              <a:spcAft>
+                <a:spcPts val="500"/>
+              </a:spcAft>
+            </a:pPr>
+            <a:r>
+              <a:rPr sz="1250" b="0">
+                <a:solidFill>
+                  <a:srgbClr val="6B6A66"/>
+                </a:solidFill>
+                <a:latin typeface="맑은 고딕"/>
+              </a:rPr>
+              <a:t>• 변경 즉시 신청 모달에 반영</a:t>
+            </a:r>
+          </a:p>
+        </p:txBody>
+      </p:sp>
+      <p:sp>
+        <p:nvSpPr>
+          <p:cNvPr id="10" name="Rectangle 9"/>
+          <p:cNvSpPr/>
+          <p:nvPr/>
+        </p:nvSpPr>
+        <p:spPr>
+          <a:xfrm>
+            <a:off x="6172200" y="1417320"/>
+            <a:ext cx="5376672" cy="2103120"/>
+          </a:xfrm>
+          <a:prstGeom prst="rect">
+            <a:avLst/>
+          </a:prstGeom>
+          <a:solidFill>
+            <a:srgbClr val="FFFFFF"/>
+          </a:solidFill>
+          <a:ln w="12700">
+            <a:solidFill>
+              <a:srgbClr val="E5E3DE"/>
+            </a:solidFill>
+          </a:ln>
+          <a:effectLst/>
+        </p:spPr>
+        <p:style>
+          <a:lnRef idx="1">
+            <a:schemeClr val="accent1"/>
+          </a:lnRef>
+          <a:fillRef idx="3">
+            <a:schemeClr val="accent1"/>
+          </a:fillRef>
+          <a:effectRef idx="2">
+            <a:schemeClr val="accent1"/>
+          </a:effectRef>
+          <a:fontRef idx="minor">
+            <a:schemeClr val="lt1"/>
+          </a:fontRef>
+        </p:style>
+        <p:txBody>
+          <a:bodyPr rtlCol="0" anchor="ctr"/>
+          <a:lstStyle/>
+          <a:p>
+            <a:pPr algn="ctr"/>
+          </a:p>
+        </p:txBody>
+      </p:sp>
+      <p:sp>
+        <p:nvSpPr>
+          <p:cNvPr id="11" name="Rectangle 10"/>
+          <p:cNvSpPr/>
+          <p:nvPr/>
+        </p:nvSpPr>
+        <p:spPr>
+          <a:xfrm>
+            <a:off x="6172200" y="1417320"/>
+            <a:ext cx="5376672" cy="82296"/>
+          </a:xfrm>
+          <a:prstGeom prst="rect">
+            <a:avLst/>
+          </a:prstGeom>
+          <a:solidFill>
+            <a:srgbClr val="C0532B"/>
+          </a:solidFill>
+          <a:ln>
+            <a:noFill/>
+          </a:ln>
+          <a:effectLst/>
+        </p:spPr>
+        <p:style>
+          <a:lnRef idx="1">
+            <a:schemeClr val="accent1"/>
+          </a:lnRef>
+          <a:fillRef idx="3">
+            <a:schemeClr val="accent1"/>
+          </a:fillRef>
+          <a:effectRef idx="2">
+            <a:schemeClr val="accent1"/>
+          </a:effectRef>
+          <a:fontRef idx="minor">
+            <a:schemeClr val="lt1"/>
+          </a:fontRef>
+        </p:style>
+        <p:txBody>
+          <a:bodyPr rtlCol="0" anchor="ctr"/>
+          <a:lstStyle/>
+          <a:p>
+            <a:pPr algn="ctr"/>
+          </a:p>
+        </p:txBody>
+      </p:sp>
+      <p:sp>
+        <p:nvSpPr>
+          <p:cNvPr id="12" name="TextBox 11"/>
+          <p:cNvSpPr txBox="1"/>
+          <p:nvPr/>
+        </p:nvSpPr>
+        <p:spPr>
+          <a:xfrm>
+            <a:off x="6373368" y="1618488"/>
+            <a:ext cx="4974336" cy="457200"/>
+          </a:xfrm>
+          <a:prstGeom prst="rect">
+            <a:avLst/>
+          </a:prstGeom>
+          <a:noFill/>
+        </p:spPr>
+        <p:txBody>
+          <a:bodyPr wrap="square" anchor="t" lIns="25400" rIns="25400" tIns="25400" bIns="25400">
+            <a:spAutoFit/>
+          </a:bodyPr>
+          <a:lstStyle/>
+          <a:p>
+            <a:pPr algn="l"/>
+            <a:r>
+              <a:rPr sz="1600" b="1">
+                <a:solidFill>
+                  <a:srgbClr val="1F1F1D"/>
+                </a:solidFill>
+                <a:latin typeface="맑은 고딕"/>
+              </a:rPr>
+              <a:t>공지사항</a:t>
+            </a:r>
+          </a:p>
+        </p:txBody>
+      </p:sp>
+      <p:sp>
+        <p:nvSpPr>
+          <p:cNvPr id="13" name="TextBox 12"/>
+          <p:cNvSpPr txBox="1"/>
+          <p:nvPr/>
+        </p:nvSpPr>
+        <p:spPr>
+          <a:xfrm>
+            <a:off x="6373368" y="2075688"/>
+            <a:ext cx="4974336" cy="1280160"/>
+          </a:xfrm>
+          <a:prstGeom prst="rect">
+            <a:avLst/>
+          </a:prstGeom>
+          <a:noFill/>
+        </p:spPr>
+        <p:txBody>
+          <a:bodyPr wrap="square" anchor="t" lIns="25400" rIns="25400" tIns="25400" bIns="25400">
+            <a:spAutoFit/>
+          </a:bodyPr>
+          <a:lstStyle/>
+          <a:p>
+            <a:pPr algn="l">
+              <a:spcAft>
+                <a:spcPts val="500"/>
+              </a:spcAft>
+            </a:pPr>
+            <a:r>
+              <a:rPr sz="1250" b="0">
+                <a:solidFill>
+                  <a:srgbClr val="6B6A66"/>
+                </a:solidFill>
+                <a:latin typeface="맑은 고딕"/>
+              </a:rPr>
+              <a:t>• 관리자 작성 / 저장 / 삭제</a:t>
+            </a:r>
+          </a:p>
+          <a:p>
+            <a:pPr algn="l">
+              <a:spcAft>
+                <a:spcPts val="500"/>
+              </a:spcAft>
+            </a:pPr>
+            <a:r>
+              <a:rPr sz="1250" b="0">
+                <a:solidFill>
+                  <a:srgbClr val="6B6A66"/>
+                </a:solidFill>
+                <a:latin typeface="맑은 고딕"/>
+              </a:rPr>
+              <a:t>• 사용자 화면 상단 배너로 표시</a:t>
+            </a:r>
+          </a:p>
+          <a:p>
+            <a:pPr algn="l">
+              <a:spcAft>
+                <a:spcPts val="500"/>
+              </a:spcAft>
+            </a:pPr>
+            <a:r>
+              <a:rPr sz="1250" b="0">
+                <a:solidFill>
+                  <a:srgbClr val="6B6A66"/>
+                </a:solidFill>
+                <a:latin typeface="맑은 고딕"/>
+              </a:rPr>
+              <a:t>• 공지 없으면 배너 자동 숨김</a:t>
+            </a:r>
+          </a:p>
+          <a:p>
+            <a:pPr algn="l">
+              <a:spcAft>
+                <a:spcPts val="500"/>
+              </a:spcAft>
+            </a:pPr>
+            <a:r>
+              <a:rPr sz="1250" b="0">
+                <a:solidFill>
+                  <a:srgbClr val="6B6A66"/>
+                </a:solidFill>
+                <a:latin typeface="맑은 고딕"/>
+              </a:rPr>
+              <a:t>• 출력 XSS 방어 (c:out)</a:t>
+            </a:r>
+          </a:p>
+        </p:txBody>
+      </p:sp>
+      <p:sp>
+        <p:nvSpPr>
+          <p:cNvPr id="14" name="Rectangle 13"/>
+          <p:cNvSpPr/>
+          <p:nvPr/>
+        </p:nvSpPr>
+        <p:spPr>
+          <a:xfrm>
+            <a:off x="640080" y="3703320"/>
+            <a:ext cx="5349240" cy="2194560"/>
+          </a:xfrm>
+          <a:prstGeom prst="rect">
+            <a:avLst/>
+          </a:prstGeom>
+          <a:solidFill>
+            <a:srgbClr val="FFFFFF"/>
+          </a:solidFill>
+          <a:ln w="12700">
+            <a:solidFill>
+              <a:srgbClr val="E5E3DE"/>
+            </a:solidFill>
+          </a:ln>
+          <a:effectLst/>
+        </p:spPr>
+        <p:style>
+          <a:lnRef idx="1">
+            <a:schemeClr val="accent1"/>
+          </a:lnRef>
+          <a:fillRef idx="3">
+            <a:schemeClr val="accent1"/>
+          </a:fillRef>
+          <a:effectRef idx="2">
+            <a:schemeClr val="accent1"/>
+          </a:effectRef>
+          <a:fontRef idx="minor">
+            <a:schemeClr val="lt1"/>
+          </a:fontRef>
+        </p:style>
+        <p:txBody>
+          <a:bodyPr rtlCol="0" anchor="ctr"/>
+          <a:lstStyle/>
+          <a:p>
+            <a:pPr algn="ctr"/>
+          </a:p>
+        </p:txBody>
+      </p:sp>
+      <p:sp>
+        <p:nvSpPr>
+          <p:cNvPr id="15" name="Rectangle 14"/>
+          <p:cNvSpPr/>
+          <p:nvPr/>
+        </p:nvSpPr>
+        <p:spPr>
+          <a:xfrm>
+            <a:off x="640080" y="3703320"/>
+            <a:ext cx="5349240" cy="82296"/>
+          </a:xfrm>
+          <a:prstGeom prst="rect">
+            <a:avLst/>
+          </a:prstGeom>
+          <a:solidFill>
+            <a:srgbClr val="2E9E5B"/>
+          </a:solidFill>
+          <a:ln>
+            <a:noFill/>
+          </a:ln>
+          <a:effectLst/>
+        </p:spPr>
+        <p:style>
+          <a:lnRef idx="1">
+            <a:schemeClr val="accent1"/>
+          </a:lnRef>
+          <a:fillRef idx="3">
+            <a:schemeClr val="accent1"/>
+          </a:fillRef>
+          <a:effectRef idx="2">
+            <a:schemeClr val="accent1"/>
+          </a:effectRef>
+          <a:fontRef idx="minor">
+            <a:schemeClr val="lt1"/>
+          </a:fontRef>
+        </p:style>
+        <p:txBody>
+          <a:bodyPr rtlCol="0" anchor="ctr"/>
+          <a:lstStyle/>
+          <a:p>
+            <a:pPr algn="ctr"/>
+          </a:p>
+        </p:txBody>
+      </p:sp>
+      <p:sp>
+        <p:nvSpPr>
+          <p:cNvPr id="16" name="TextBox 15"/>
+          <p:cNvSpPr txBox="1"/>
+          <p:nvPr/>
+        </p:nvSpPr>
+        <p:spPr>
+          <a:xfrm>
+            <a:off x="841248" y="3904488"/>
+            <a:ext cx="4946904" cy="457200"/>
+          </a:xfrm>
+          <a:prstGeom prst="rect">
+            <a:avLst/>
+          </a:prstGeom>
+          <a:noFill/>
+        </p:spPr>
+        <p:txBody>
+          <a:bodyPr wrap="square" anchor="t" lIns="25400" rIns="25400" tIns="25400" bIns="25400">
+            <a:spAutoFit/>
+          </a:bodyPr>
+          <a:lstStyle/>
+          <a:p>
+            <a:pPr algn="l"/>
+            <a:r>
+              <a:rPr sz="1600" b="1">
+                <a:solidFill>
+                  <a:srgbClr val="1F1F1D"/>
+                </a:solidFill>
+                <a:latin typeface="맑은 고딕"/>
+              </a:rPr>
+              <a:t>설정 접기 패널</a:t>
+            </a:r>
+          </a:p>
+        </p:txBody>
+      </p:sp>
+      <p:sp>
+        <p:nvSpPr>
+          <p:cNvPr id="17" name="TextBox 16"/>
+          <p:cNvSpPr txBox="1"/>
+          <p:nvPr/>
+        </p:nvSpPr>
+        <p:spPr>
+          <a:xfrm>
+            <a:off x="841248" y="4361688"/>
+            <a:ext cx="4946904" cy="1371600"/>
+          </a:xfrm>
+          <a:prstGeom prst="rect">
+            <a:avLst/>
+          </a:prstGeom>
+          <a:noFill/>
+        </p:spPr>
+        <p:txBody>
+          <a:bodyPr wrap="square" anchor="t" lIns="25400" rIns="25400" tIns="25400" bIns="25400">
+            <a:spAutoFit/>
+          </a:bodyPr>
+          <a:lstStyle/>
+          <a:p>
+            <a:pPr algn="l">
+              <a:spcAft>
+                <a:spcPts val="500"/>
+              </a:spcAft>
+            </a:pPr>
+            <a:r>
+              <a:rPr sz="1250" b="0">
+                <a:solidFill>
+                  <a:srgbClr val="6B6A66"/>
+                </a:solidFill>
+                <a:latin typeface="맑은 고딕"/>
+              </a:rPr>
+              <a:t>• 비밀번호·공지를 ⚙ 설정으로 통합</a:t>
+            </a:r>
+          </a:p>
+          <a:p>
+            <a:pPr algn="l">
+              <a:spcAft>
+                <a:spcPts val="500"/>
+              </a:spcAft>
+            </a:pPr>
+            <a:r>
+              <a:rPr sz="1250" b="0">
+                <a:solidFill>
+                  <a:srgbClr val="6B6A66"/>
+                </a:solidFill>
+                <a:latin typeface="맑은 고딕"/>
+              </a:rPr>
+              <a:t>• 기본 접힘 → 대시보드 먼저 노출</a:t>
+            </a:r>
+          </a:p>
+          <a:p>
+            <a:pPr algn="l">
+              <a:spcAft>
+                <a:spcPts val="500"/>
+              </a:spcAft>
+            </a:pPr>
+            <a:r>
+              <a:rPr sz="1250" b="0">
+                <a:solidFill>
+                  <a:srgbClr val="6B6A66"/>
+                </a:solidFill>
+                <a:latin typeface="맑은 고딕"/>
+              </a:rPr>
+              <a:t>• 필요할 때만 펼쳐서 관리</a:t>
+            </a:r>
+          </a:p>
+        </p:txBody>
+      </p:sp>
+      <p:sp>
+        <p:nvSpPr>
+          <p:cNvPr id="18" name="Rectangle 17"/>
+          <p:cNvSpPr/>
+          <p:nvPr/>
+        </p:nvSpPr>
+        <p:spPr>
+          <a:xfrm>
+            <a:off x="6172200" y="3703320"/>
+            <a:ext cx="5376672" cy="2194560"/>
+          </a:xfrm>
+          <a:prstGeom prst="rect">
+            <a:avLst/>
+          </a:prstGeom>
+          <a:solidFill>
+            <a:srgbClr val="FFFFFF"/>
+          </a:solidFill>
+          <a:ln w="12700">
+            <a:solidFill>
+              <a:srgbClr val="E5E3DE"/>
+            </a:solidFill>
+          </a:ln>
+          <a:effectLst/>
+        </p:spPr>
+        <p:style>
+          <a:lnRef idx="1">
+            <a:schemeClr val="accent1"/>
+          </a:lnRef>
+          <a:fillRef idx="3">
+            <a:schemeClr val="accent1"/>
+          </a:fillRef>
+          <a:effectRef idx="2">
+            <a:schemeClr val="accent1"/>
+          </a:effectRef>
+          <a:fontRef idx="minor">
+            <a:schemeClr val="lt1"/>
+          </a:fontRef>
+        </p:style>
+        <p:txBody>
+          <a:bodyPr rtlCol="0" anchor="ctr"/>
+          <a:lstStyle/>
+          <a:p>
+            <a:pPr algn="ctr"/>
+          </a:p>
+        </p:txBody>
+      </p:sp>
+      <p:sp>
+        <p:nvSpPr>
+          <p:cNvPr id="19" name="Rectangle 18"/>
+          <p:cNvSpPr/>
+          <p:nvPr/>
+        </p:nvSpPr>
+        <p:spPr>
+          <a:xfrm>
+            <a:off x="6172200" y="3703320"/>
+            <a:ext cx="5376672" cy="82296"/>
+          </a:xfrm>
+          <a:prstGeom prst="rect">
+            <a:avLst/>
+          </a:prstGeom>
+          <a:solidFill>
+            <a:srgbClr val="222B45"/>
+          </a:solidFill>
+          <a:ln>
+            <a:noFill/>
+          </a:ln>
+          <a:effectLst/>
+        </p:spPr>
+        <p:style>
+          <a:lnRef idx="1">
+            <a:schemeClr val="accent1"/>
+          </a:lnRef>
+          <a:fillRef idx="3">
+            <a:schemeClr val="accent1"/>
+          </a:fillRef>
+          <a:effectRef idx="2">
+            <a:schemeClr val="accent1"/>
+          </a:effectRef>
+          <a:fontRef idx="minor">
+            <a:schemeClr val="lt1"/>
+          </a:fontRef>
+        </p:style>
+        <p:txBody>
+          <a:bodyPr rtlCol="0" anchor="ctr"/>
+          <a:lstStyle/>
+          <a:p>
+            <a:pPr algn="ctr"/>
+          </a:p>
+        </p:txBody>
+      </p:sp>
+      <p:sp>
+        <p:nvSpPr>
+          <p:cNvPr id="20" name="TextBox 19"/>
+          <p:cNvSpPr txBox="1"/>
+          <p:nvPr/>
+        </p:nvSpPr>
+        <p:spPr>
+          <a:xfrm>
+            <a:off x="6373368" y="3904488"/>
+            <a:ext cx="4974336" cy="457200"/>
+          </a:xfrm>
+          <a:prstGeom prst="rect">
+            <a:avLst/>
+          </a:prstGeom>
+          <a:noFill/>
+        </p:spPr>
+        <p:txBody>
+          <a:bodyPr wrap="square" anchor="t" lIns="25400" rIns="25400" tIns="25400" bIns="25400">
+            <a:spAutoFit/>
+          </a:bodyPr>
+          <a:lstStyle/>
+          <a:p>
+            <a:pPr algn="l"/>
+            <a:r>
+              <a:rPr sz="1600" b="1">
+                <a:solidFill>
+                  <a:srgbClr val="1F1F1D"/>
+                </a:solidFill>
+                <a:latin typeface="맑은 고딕"/>
+              </a:rPr>
+              <a:t>관리자 접근 제어</a:t>
+            </a:r>
+          </a:p>
+        </p:txBody>
+      </p:sp>
+      <p:sp>
+        <p:nvSpPr>
+          <p:cNvPr id="21" name="TextBox 20"/>
+          <p:cNvSpPr txBox="1"/>
+          <p:nvPr/>
+        </p:nvSpPr>
+        <p:spPr>
+          <a:xfrm>
+            <a:off x="6373368" y="4361688"/>
+            <a:ext cx="4974336" cy="1371600"/>
+          </a:xfrm>
+          <a:prstGeom prst="rect">
+            <a:avLst/>
+          </a:prstGeom>
+          <a:noFill/>
+        </p:spPr>
+        <p:txBody>
+          <a:bodyPr wrap="square" anchor="t" lIns="25400" rIns="25400" tIns="25400" bIns="25400">
+            <a:spAutoFit/>
+          </a:bodyPr>
+          <a:lstStyle/>
+          <a:p>
+            <a:pPr algn="l">
+              <a:spcAft>
+                <a:spcPts val="500"/>
+              </a:spcAft>
+            </a:pPr>
+            <a:r>
+              <a:rPr sz="1250" b="0">
+                <a:solidFill>
+                  <a:srgbClr val="6B6A66"/>
+                </a:solidFill>
+                <a:latin typeface="맑은 고딕"/>
+              </a:rPr>
+              <a:t>• 대시보드 · 관리 API 사번 인가</a:t>
+            </a:r>
+          </a:p>
+          <a:p>
+            <a:pPr>
+              <a:spcAft>
+                <a:spcPts val="500"/>
+              </a:spcAft>
+            </a:pPr>
+            <a:r>
+              <a:rPr sz="1250" b="0">
+                <a:solidFill>
+                  <a:srgbClr val="6B6A66"/>
+                </a:solidFill>
+                <a:latin typeface="맑은 고딕"/>
+              </a:rPr>
+              <a:t>• 허용 사번만 통과 (미허가 403)</a:t>
+            </a:r>
+          </a:p>
+          <a:p>
+            <a:pPr>
+              <a:spcAft>
+                <a:spcPts val="500"/>
+              </a:spcAft>
+            </a:pPr>
+            <a:r>
+              <a:rPr sz="1250" b="0">
+                <a:solidFill>
+                  <a:srgbClr val="6B6A66"/>
+                </a:solidFill>
+                <a:latin typeface="맑은 고딕"/>
+              </a:rPr>
+              <a:t>• 추후 iBiz SSO 연동 예정</a:t>
+            </a:r>
+          </a:p>
+          <a:p>
+            <a:pPr>
+              <a:spcAft>
+                <a:spcPts val="500"/>
+              </a:spcAft>
+            </a:pPr>
+            <a:r>
+              <a:rPr sz="1250" b="0">
+                <a:solidFill>
+                  <a:srgbClr val="6B6A66"/>
+                </a:solidFill>
+                <a:latin typeface="맑은 고딕"/>
+              </a:rPr>
+              <a:t>• sram_config 신규 · clean compile 검증</a:t>
+            </a:r>
+          </a:p>
+        </p:txBody>
+      </p:sp>
+    </p:spTree>
+  </p:cSld>
+  <p:clrMapOvr>
+    <a:masterClrMapping/>
+  </p:clrMapOvr>
+</p:sld>
+</file>
+
+<file path=ppt/slides/slide9.xml><?xml version="1.0" encoding="utf-8"?>
 <p:sld xmlns:a="http://schemas.openxmlformats.org/drawingml/2006/main" xmlns:p="http://schemas.openxmlformats.org/presentationml/2006/main" xmlns:r="http://schemas.openxmlformats.org/officeDocument/2006/relationships">
   <p:cSld>
     <p:bg>
@@ -9134,7 +10163,7 @@
         </p:nvSpPr>
         <p:spPr>
           <a:xfrm>
-            <a:off x="914400" y="914400"/>
+            <a:off x="914400" y="777240"/>
             <a:ext cx="10360152" cy="731520"/>
           </a:xfrm>
           <a:prstGeom prst="rect">
@@ -9169,8 +10198,8 @@
         </p:nvSpPr>
         <p:spPr>
           <a:xfrm>
-            <a:off x="1463040" y="2011680"/>
-            <a:ext cx="9262872" cy="3200400"/>
+            <a:off x="1463040" y="1828800"/>
+            <a:ext cx="9262872" cy="3657600"/>
           </a:xfrm>
           <a:prstGeom prst="rect">
             <a:avLst/>
@@ -9213,7 +10242,7 @@
         </p:nvSpPr>
         <p:spPr>
           <a:xfrm>
-            <a:off x="1920240" y="2286000"/>
+            <a:off x="1920240" y="2148840"/>
             <a:ext cx="548640" cy="502920"/>
           </a:xfrm>
           <a:prstGeom prst="rect">
@@ -9248,7 +10277,7 @@
         </p:nvSpPr>
         <p:spPr>
           <a:xfrm>
-            <a:off x="2468880" y="2286000"/>
+            <a:off x="2468880" y="2148840"/>
             <a:ext cx="7955279" cy="502920"/>
           </a:xfrm>
           <a:prstGeom prst="rect">
@@ -9283,7 +10312,7 @@
         </p:nvSpPr>
         <p:spPr>
           <a:xfrm>
-            <a:off x="1920240" y="2852928"/>
+            <a:off x="1920240" y="2679192"/>
             <a:ext cx="548640" cy="502920"/>
           </a:xfrm>
           <a:prstGeom prst="rect">
@@ -9318,7 +10347,7 @@
         </p:nvSpPr>
         <p:spPr>
           <a:xfrm>
-            <a:off x="2468880" y="2852928"/>
+            <a:off x="2468880" y="2679192"/>
             <a:ext cx="7955279" cy="502920"/>
           </a:xfrm>
           <a:prstGeom prst="rect">
@@ -9353,7 +10382,7 @@
         </p:nvSpPr>
         <p:spPr>
           <a:xfrm>
-            <a:off x="1920240" y="3419856"/>
+            <a:off x="1920240" y="3209544"/>
             <a:ext cx="548640" cy="502920"/>
           </a:xfrm>
           <a:prstGeom prst="rect">
@@ -9388,7 +10417,7 @@
         </p:nvSpPr>
         <p:spPr>
           <a:xfrm>
-            <a:off x="2468880" y="3419856"/>
+            <a:off x="2468880" y="3209544"/>
             <a:ext cx="7955279" cy="502920"/>
           </a:xfrm>
           <a:prstGeom prst="rect">
@@ -9423,7 +10452,7 @@
         </p:nvSpPr>
         <p:spPr>
           <a:xfrm>
-            <a:off x="1920240" y="3986784"/>
+            <a:off x="1920240" y="3739896"/>
             <a:ext cx="548640" cy="502920"/>
           </a:xfrm>
           <a:prstGeom prst="rect">
@@ -9458,7 +10487,7 @@
         </p:nvSpPr>
         <p:spPr>
           <a:xfrm>
-            <a:off x="2468880" y="3986784"/>
+            <a:off x="2468880" y="3739896"/>
             <a:ext cx="7955279" cy="502920"/>
           </a:xfrm>
           <a:prstGeom prst="rect">
@@ -9493,7 +10522,7 @@
         </p:nvSpPr>
         <p:spPr>
           <a:xfrm>
-            <a:off x="1920240" y="4553712"/>
+            <a:off x="1920240" y="4270248"/>
             <a:ext cx="548640" cy="502920"/>
           </a:xfrm>
           <a:prstGeom prst="rect">
@@ -9528,7 +10557,7 @@
         </p:nvSpPr>
         <p:spPr>
           <a:xfrm>
-            <a:off x="2468880" y="4553712"/>
+            <a:off x="2468880" y="4270248"/>
             <a:ext cx="7955279" cy="502920"/>
           </a:xfrm>
           <a:prstGeom prst="rect">
@@ -9550,6 +10579,76 @@
                 </a:solidFill>
                 <a:latin typeface="맑은 고딕"/>
               </a:rPr>
+              <a:t>관리자: 비밀번호 변경 · 공지사항 · 설정 패널 · 사번 접근 제어</a:t>
+            </a:r>
+          </a:p>
+        </p:txBody>
+      </p:sp>
+      <p:sp>
+        <p:nvSpPr>
+          <p:cNvPr id="14" name="TextBox 13"/>
+          <p:cNvSpPr txBox="1"/>
+          <p:nvPr/>
+        </p:nvSpPr>
+        <p:spPr>
+          <a:xfrm>
+            <a:off x="1920240" y="4800600"/>
+            <a:ext cx="548640" cy="502920"/>
+          </a:xfrm>
+          <a:prstGeom prst="rect">
+            <a:avLst/>
+          </a:prstGeom>
+          <a:noFill/>
+        </p:spPr>
+        <p:txBody>
+          <a:bodyPr wrap="square" anchor="ctr" lIns="25400" rIns="25400" tIns="25400" bIns="25400">
+            <a:spAutoFit/>
+          </a:bodyPr>
+          <a:lstStyle/>
+          <a:p>
+            <a:pPr algn="l"/>
+            <a:r>
+              <a:rPr sz="1800" b="1">
+                <a:solidFill>
+                  <a:srgbClr val="6FD89A"/>
+                </a:solidFill>
+                <a:latin typeface="맑은 고딕"/>
+              </a:rPr>
+              <a:t>✓</a:t>
+            </a:r>
+          </a:p>
+        </p:txBody>
+      </p:sp>
+      <p:sp>
+        <p:nvSpPr>
+          <p:cNvPr id="15" name="TextBox 14"/>
+          <p:cNvSpPr txBox="1"/>
+          <p:nvPr/>
+        </p:nvSpPr>
+        <p:spPr>
+          <a:xfrm>
+            <a:off x="2468880" y="4800600"/>
+            <a:ext cx="7955279" cy="502920"/>
+          </a:xfrm>
+          <a:prstGeom prst="rect">
+            <a:avLst/>
+          </a:prstGeom>
+          <a:noFill/>
+        </p:spPr>
+        <p:txBody>
+          <a:bodyPr wrap="square" anchor="ctr" lIns="25400" rIns="25400" tIns="25400" bIns="25400">
+            <a:spAutoFit/>
+          </a:bodyPr>
+          <a:lstStyle/>
+          <a:p>
+            <a:pPr algn="l"/>
+            <a:r>
+              <a:rPr sz="1500" b="0">
+                <a:solidFill>
+                  <a:srgbClr val="FFFFFF"/>
+                </a:solidFill>
+                <a:latin typeface="맑은 고딕"/>
+              </a:rPr>
               <a:t>실행: http://localhost:9090/ (신청) · /admin (대시보드)</a:t>
             </a:r>
           </a:p>
@@ -9557,7 +10656,7 @@
       </p:sp>
       <p:sp>
         <p:nvSpPr>
-          <p:cNvPr id="14" name="TextBox 13"/>
+          <p:cNvPr id="16" name="TextBox 15"/>
           <p:cNvSpPr txBox="1"/>
           <p:nvPr/>
         </p:nvSpPr>
